--- a/docs/pptx/auc3/ritu-auc3-linsubhr-ratio-hosp-immune-other_10pct.pptx
+++ b/docs/pptx/auc3/ritu-auc3-linsubhr-ratio-hosp-immune-other_10pct.pptx
@@ -2443,7 +2443,7 @@
           </p:nvSpPr>
           <p:spPr>
             <a:xfrm>
-              <a:off x="1012387" y="2073503"/>
+              <a:off x="1013326" y="2073503"/>
               <a:ext cx="0" cy="3649639"/>
             </a:xfrm>
             <a:custGeom>
@@ -2486,7 +2486,7 @@
           </p:nvSpPr>
           <p:spPr>
             <a:xfrm>
-              <a:off x="1914572" y="2073503"/>
+              <a:off x="1915271" y="2073503"/>
               <a:ext cx="0" cy="3649639"/>
             </a:xfrm>
             <a:custGeom>
@@ -2529,7 +2529,7 @@
           </p:nvSpPr>
           <p:spPr>
             <a:xfrm>
-              <a:off x="2816756" y="2073503"/>
+              <a:off x="2817216" y="2073503"/>
               <a:ext cx="0" cy="3649639"/>
             </a:xfrm>
             <a:custGeom>
@@ -2572,7 +2572,7 @@
           </p:nvSpPr>
           <p:spPr>
             <a:xfrm>
-              <a:off x="3718941" y="2073503"/>
+              <a:off x="3719160" y="2073503"/>
               <a:ext cx="0" cy="3649639"/>
             </a:xfrm>
             <a:custGeom>
@@ -2615,7 +2615,7 @@
           </p:nvSpPr>
           <p:spPr>
             <a:xfrm>
-              <a:off x="4621125" y="2073503"/>
+              <a:off x="4621105" y="2073503"/>
               <a:ext cx="0" cy="3649639"/>
             </a:xfrm>
             <a:custGeom>
@@ -2658,7 +2658,7 @@
           </p:nvSpPr>
           <p:spPr>
             <a:xfrm>
-              <a:off x="5523310" y="2073503"/>
+              <a:off x="5523050" y="2073503"/>
               <a:ext cx="0" cy="3649639"/>
             </a:xfrm>
             <a:custGeom>
@@ -2701,7 +2701,7 @@
           </p:nvSpPr>
           <p:spPr>
             <a:xfrm>
-              <a:off x="6425495" y="2073503"/>
+              <a:off x="6424995" y="2073503"/>
               <a:ext cx="0" cy="3649639"/>
             </a:xfrm>
             <a:custGeom>
@@ -2744,7 +2744,7 @@
           </p:nvSpPr>
           <p:spPr>
             <a:xfrm>
-              <a:off x="7327679" y="2073503"/>
+              <a:off x="7326940" y="2073503"/>
               <a:ext cx="0" cy="3649639"/>
             </a:xfrm>
             <a:custGeom>
@@ -2787,7 +2787,7 @@
           </p:nvSpPr>
           <p:spPr>
             <a:xfrm>
-              <a:off x="8229864" y="2073503"/>
+              <a:off x="8228885" y="2073503"/>
               <a:ext cx="0" cy="3649639"/>
             </a:xfrm>
             <a:custGeom>
@@ -3045,7 +3045,7 @@
           </p:nvSpPr>
           <p:spPr>
             <a:xfrm>
-              <a:off x="1463479" y="2073503"/>
+              <a:off x="1464298" y="2073503"/>
               <a:ext cx="0" cy="3649639"/>
             </a:xfrm>
             <a:custGeom>
@@ -3088,7 +3088,7 @@
           </p:nvSpPr>
           <p:spPr>
             <a:xfrm>
-              <a:off x="2365664" y="2073503"/>
+              <a:off x="2366243" y="2073503"/>
               <a:ext cx="0" cy="3649639"/>
             </a:xfrm>
             <a:custGeom>
@@ -3131,7 +3131,7 @@
           </p:nvSpPr>
           <p:spPr>
             <a:xfrm>
-              <a:off x="3267849" y="2073503"/>
+              <a:off x="3268188" y="2073503"/>
               <a:ext cx="0" cy="3649639"/>
             </a:xfrm>
             <a:custGeom>
@@ -3174,7 +3174,7 @@
           </p:nvSpPr>
           <p:spPr>
             <a:xfrm>
-              <a:off x="4170033" y="2073503"/>
+              <a:off x="4170133" y="2073503"/>
               <a:ext cx="0" cy="3649639"/>
             </a:xfrm>
             <a:custGeom>
@@ -3217,7 +3217,7 @@
           </p:nvSpPr>
           <p:spPr>
             <a:xfrm>
-              <a:off x="5072218" y="2073503"/>
+              <a:off x="5072078" y="2073503"/>
               <a:ext cx="0" cy="3649639"/>
             </a:xfrm>
             <a:custGeom>
@@ -3260,7 +3260,7 @@
           </p:nvSpPr>
           <p:spPr>
             <a:xfrm>
-              <a:off x="5974402" y="2073503"/>
+              <a:off x="5974022" y="2073503"/>
               <a:ext cx="0" cy="3649639"/>
             </a:xfrm>
             <a:custGeom>
@@ -3303,7 +3303,7 @@
           </p:nvSpPr>
           <p:spPr>
             <a:xfrm>
-              <a:off x="6876587" y="2073503"/>
+              <a:off x="6875967" y="2073503"/>
               <a:ext cx="0" cy="3649639"/>
             </a:xfrm>
             <a:custGeom>
@@ -3346,7 +3346,7 @@
           </p:nvSpPr>
           <p:spPr>
             <a:xfrm>
-              <a:off x="7778772" y="2073503"/>
+              <a:off x="7777912" y="2073503"/>
               <a:ext cx="0" cy="3649639"/>
             </a:xfrm>
             <a:custGeom>
@@ -3390,458 +3390,458 @@
           <p:spPr>
             <a:xfrm>
               <a:off x="1172049" y="2073503"/>
-              <a:ext cx="7090630" cy="3482263"/>
+              <a:ext cx="7090630" cy="3482235"/>
             </a:xfrm>
             <a:custGeom>
               <a:avLst/>
               <a:pathLst>
-                <a:path w="7090630" h="3482263">
+                <a:path w="7090630" h="3482235">
                   <a:moveTo>
-                    <a:pt x="2063959" y="0"/>
+                    <a:pt x="2067497" y="0"/>
                   </a:moveTo>
                   <a:lnTo>
-                    <a:pt x="2077053" y="72909"/>
-                  </a:lnTo>
-                  <a:lnTo>
-                    <a:pt x="2148675" y="429975"/>
-                  </a:lnTo>
-                  <a:lnTo>
-                    <a:pt x="2220298" y="749662"/>
-                  </a:lnTo>
-                  <a:lnTo>
-                    <a:pt x="2291920" y="1035882"/>
-                  </a:lnTo>
-                  <a:lnTo>
-                    <a:pt x="2363543" y="1292138"/>
-                  </a:lnTo>
-                  <a:lnTo>
-                    <a:pt x="2435165" y="1521569"/>
-                  </a:lnTo>
-                  <a:lnTo>
-                    <a:pt x="2506788" y="1726981"/>
-                  </a:lnTo>
-                  <a:lnTo>
-                    <a:pt x="2578410" y="1910889"/>
-                  </a:lnTo>
-                  <a:lnTo>
-                    <a:pt x="2650033" y="2075545"/>
-                  </a:lnTo>
-                  <a:lnTo>
-                    <a:pt x="2721655" y="2222964"/>
-                  </a:lnTo>
-                  <a:lnTo>
-                    <a:pt x="2793278" y="2354950"/>
-                  </a:lnTo>
-                  <a:lnTo>
-                    <a:pt x="2864901" y="2473119"/>
-                  </a:lnTo>
-                  <a:lnTo>
-                    <a:pt x="2936523" y="2578917"/>
-                  </a:lnTo>
-                  <a:lnTo>
-                    <a:pt x="3008146" y="2646417"/>
-                  </a:lnTo>
-                  <a:lnTo>
-                    <a:pt x="3079768" y="2608575"/>
-                  </a:lnTo>
-                  <a:lnTo>
-                    <a:pt x="3151391" y="2569023"/>
-                  </a:lnTo>
-                  <a:lnTo>
-                    <a:pt x="3223013" y="2527684"/>
-                  </a:lnTo>
-                  <a:lnTo>
-                    <a:pt x="3294636" y="2484476"/>
-                  </a:lnTo>
-                  <a:lnTo>
-                    <a:pt x="3366258" y="2439316"/>
-                  </a:lnTo>
-                  <a:lnTo>
-                    <a:pt x="3437881" y="2392115"/>
-                  </a:lnTo>
-                  <a:lnTo>
-                    <a:pt x="3509503" y="2342780"/>
-                  </a:lnTo>
-                  <a:lnTo>
-                    <a:pt x="3581126" y="2291216"/>
-                  </a:lnTo>
-                  <a:lnTo>
-                    <a:pt x="3652748" y="2237322"/>
-                  </a:lnTo>
-                  <a:lnTo>
-                    <a:pt x="3724371" y="2180992"/>
-                  </a:lnTo>
-                  <a:lnTo>
-                    <a:pt x="3795993" y="2122117"/>
-                  </a:lnTo>
-                  <a:lnTo>
-                    <a:pt x="3867616" y="2060580"/>
-                  </a:lnTo>
-                  <a:lnTo>
-                    <a:pt x="3939238" y="1996263"/>
-                  </a:lnTo>
-                  <a:lnTo>
-                    <a:pt x="4010861" y="1929038"/>
-                  </a:lnTo>
-                  <a:lnTo>
-                    <a:pt x="4082483" y="1858776"/>
-                  </a:lnTo>
-                  <a:lnTo>
-                    <a:pt x="4154106" y="1785338"/>
-                  </a:lnTo>
-                  <a:lnTo>
-                    <a:pt x="4225729" y="1708582"/>
-                  </a:lnTo>
-                  <a:lnTo>
-                    <a:pt x="4297351" y="1628356"/>
-                  </a:lnTo>
-                  <a:lnTo>
-                    <a:pt x="4368974" y="1544505"/>
-                  </a:lnTo>
-                  <a:lnTo>
-                    <a:pt x="4440596" y="1456865"/>
-                  </a:lnTo>
-                  <a:lnTo>
-                    <a:pt x="4512219" y="1365263"/>
-                  </a:lnTo>
-                  <a:lnTo>
-                    <a:pt x="4583841" y="1269522"/>
-                  </a:lnTo>
-                  <a:lnTo>
-                    <a:pt x="4655464" y="1169454"/>
-                  </a:lnTo>
-                  <a:lnTo>
-                    <a:pt x="4727086" y="1064864"/>
-                  </a:lnTo>
-                  <a:lnTo>
-                    <a:pt x="4798709" y="955547"/>
-                  </a:lnTo>
-                  <a:lnTo>
-                    <a:pt x="4870331" y="841289"/>
-                  </a:lnTo>
-                  <a:lnTo>
-                    <a:pt x="4941954" y="721868"/>
-                  </a:lnTo>
-                  <a:lnTo>
-                    <a:pt x="5013576" y="597050"/>
-                  </a:lnTo>
-                  <a:lnTo>
-                    <a:pt x="5085199" y="466590"/>
-                  </a:lnTo>
-                  <a:lnTo>
-                    <a:pt x="5156821" y="330235"/>
-                  </a:lnTo>
-                  <a:lnTo>
-                    <a:pt x="5228444" y="187718"/>
-                  </a:lnTo>
-                  <a:lnTo>
-                    <a:pt x="5300066" y="38760"/>
-                  </a:lnTo>
-                  <a:lnTo>
-                    <a:pt x="5317897" y="0"/>
+                    <a:pt x="2077053" y="53414"/>
+                  </a:lnTo>
+                  <a:lnTo>
+                    <a:pt x="2148675" y="411939"/>
+                  </a:lnTo>
+                  <a:lnTo>
+                    <a:pt x="2220298" y="732992"/>
+                  </a:lnTo>
+                  <a:lnTo>
+                    <a:pt x="2291920" y="1020490"/>
+                  </a:lnTo>
+                  <a:lnTo>
+                    <a:pt x="2363543" y="1277940"/>
+                  </a:lnTo>
+                  <a:lnTo>
+                    <a:pt x="2435165" y="1508483"/>
+                  </a:lnTo>
+                  <a:lnTo>
+                    <a:pt x="2506788" y="1714929"/>
+                  </a:lnTo>
+                  <a:lnTo>
+                    <a:pt x="2578410" y="1899799"/>
+                  </a:lnTo>
+                  <a:lnTo>
+                    <a:pt x="2650033" y="2065347"/>
+                  </a:lnTo>
+                  <a:lnTo>
+                    <a:pt x="2721655" y="2213593"/>
+                  </a:lnTo>
+                  <a:lnTo>
+                    <a:pt x="2793278" y="2346344"/>
+                  </a:lnTo>
+                  <a:lnTo>
+                    <a:pt x="2864901" y="2465221"/>
+                  </a:lnTo>
+                  <a:lnTo>
+                    <a:pt x="2936523" y="2571673"/>
+                  </a:lnTo>
+                  <a:lnTo>
+                    <a:pt x="3008146" y="2649164"/>
+                  </a:lnTo>
+                  <a:lnTo>
+                    <a:pt x="3079768" y="2611656"/>
+                  </a:lnTo>
+                  <a:lnTo>
+                    <a:pt x="3151391" y="2572463"/>
+                  </a:lnTo>
+                  <a:lnTo>
+                    <a:pt x="3223013" y="2531509"/>
+                  </a:lnTo>
+                  <a:lnTo>
+                    <a:pt x="3294636" y="2488714"/>
+                  </a:lnTo>
+                  <a:lnTo>
+                    <a:pt x="3366258" y="2443996"/>
+                  </a:lnTo>
+                  <a:lnTo>
+                    <a:pt x="3437881" y="2397268"/>
+                  </a:lnTo>
+                  <a:lnTo>
+                    <a:pt x="3509503" y="2348440"/>
+                  </a:lnTo>
+                  <a:lnTo>
+                    <a:pt x="3581126" y="2297418"/>
+                  </a:lnTo>
+                  <a:lnTo>
+                    <a:pt x="3652748" y="2244102"/>
+                  </a:lnTo>
+                  <a:lnTo>
+                    <a:pt x="3724371" y="2188391"/>
+                  </a:lnTo>
+                  <a:lnTo>
+                    <a:pt x="3795993" y="2130176"/>
+                  </a:lnTo>
+                  <a:lnTo>
+                    <a:pt x="3867616" y="2069344"/>
+                  </a:lnTo>
+                  <a:lnTo>
+                    <a:pt x="3939238" y="2005779"/>
+                  </a:lnTo>
+                  <a:lnTo>
+                    <a:pt x="4010861" y="1939357"/>
+                  </a:lnTo>
+                  <a:lnTo>
+                    <a:pt x="4082483" y="1869950"/>
+                  </a:lnTo>
+                  <a:lnTo>
+                    <a:pt x="4154106" y="1797423"/>
+                  </a:lnTo>
+                  <a:lnTo>
+                    <a:pt x="4225729" y="1721637"/>
+                  </a:lnTo>
+                  <a:lnTo>
+                    <a:pt x="4297351" y="1642446"/>
+                  </a:lnTo>
+                  <a:lnTo>
+                    <a:pt x="4368974" y="1559695"/>
+                  </a:lnTo>
+                  <a:lnTo>
+                    <a:pt x="4440596" y="1473225"/>
+                  </a:lnTo>
+                  <a:lnTo>
+                    <a:pt x="4512219" y="1382869"/>
+                  </a:lnTo>
+                  <a:lnTo>
+                    <a:pt x="4583841" y="1288453"/>
+                  </a:lnTo>
+                  <a:lnTo>
+                    <a:pt x="4655464" y="1189793"/>
+                  </a:lnTo>
+                  <a:lnTo>
+                    <a:pt x="4727086" y="1086700"/>
+                  </a:lnTo>
+                  <a:lnTo>
+                    <a:pt x="4798709" y="978973"/>
+                  </a:lnTo>
+                  <a:lnTo>
+                    <a:pt x="4870331" y="866405"/>
+                  </a:lnTo>
+                  <a:lnTo>
+                    <a:pt x="4941954" y="748777"/>
+                  </a:lnTo>
+                  <a:lnTo>
+                    <a:pt x="5013576" y="625864"/>
+                  </a:lnTo>
+                  <a:lnTo>
+                    <a:pt x="5085199" y="497426"/>
+                  </a:lnTo>
+                  <a:lnTo>
+                    <a:pt x="5156821" y="363217"/>
+                  </a:lnTo>
+                  <a:lnTo>
+                    <a:pt x="5228444" y="222976"/>
+                  </a:lnTo>
+                  <a:lnTo>
+                    <a:pt x="5300066" y="76432"/>
+                  </a:lnTo>
+                  <a:lnTo>
+                    <a:pt x="5335816" y="0"/>
                   </a:lnTo>
                   <a:lnTo>
                     <a:pt x="7090630" y="0"/>
                   </a:lnTo>
                   <a:lnTo>
-                    <a:pt x="7090630" y="3482263"/>
-                  </a:lnTo>
-                  <a:lnTo>
-                    <a:pt x="7019007" y="3482090"/>
-                  </a:lnTo>
-                  <a:lnTo>
-                    <a:pt x="6947385" y="3481896"/>
-                  </a:lnTo>
-                  <a:lnTo>
-                    <a:pt x="6875762" y="3481680"/>
-                  </a:lnTo>
-                  <a:lnTo>
-                    <a:pt x="6804139" y="3481438"/>
-                  </a:lnTo>
-                  <a:lnTo>
-                    <a:pt x="6732517" y="3481169"/>
-                  </a:lnTo>
-                  <a:lnTo>
-                    <a:pt x="6660894" y="3480867"/>
-                  </a:lnTo>
-                  <a:lnTo>
-                    <a:pt x="6589272" y="3480530"/>
-                  </a:lnTo>
-                  <a:lnTo>
-                    <a:pt x="6517649" y="3480154"/>
-                  </a:lnTo>
-                  <a:lnTo>
-                    <a:pt x="6446027" y="3479734"/>
-                  </a:lnTo>
-                  <a:lnTo>
-                    <a:pt x="6374404" y="3479265"/>
-                  </a:lnTo>
-                  <a:lnTo>
-                    <a:pt x="6302782" y="3478741"/>
-                  </a:lnTo>
-                  <a:lnTo>
-                    <a:pt x="6231159" y="3478156"/>
-                  </a:lnTo>
-                  <a:lnTo>
-                    <a:pt x="6159537" y="3477502"/>
-                  </a:lnTo>
-                  <a:lnTo>
-                    <a:pt x="6087914" y="3476772"/>
-                  </a:lnTo>
-                  <a:lnTo>
-                    <a:pt x="6016292" y="3475957"/>
-                  </a:lnTo>
-                  <a:lnTo>
-                    <a:pt x="5944669" y="3475046"/>
-                  </a:lnTo>
-                  <a:lnTo>
-                    <a:pt x="5873047" y="3474029"/>
-                  </a:lnTo>
-                  <a:lnTo>
-                    <a:pt x="5801424" y="3472893"/>
-                  </a:lnTo>
-                  <a:lnTo>
-                    <a:pt x="5729802" y="3471623"/>
-                  </a:lnTo>
-                  <a:lnTo>
-                    <a:pt x="5658179" y="3470206"/>
-                  </a:lnTo>
-                  <a:lnTo>
-                    <a:pt x="5586557" y="3468623"/>
-                  </a:lnTo>
-                  <a:lnTo>
-                    <a:pt x="5514934" y="3466854"/>
-                  </a:lnTo>
-                  <a:lnTo>
-                    <a:pt x="5443311" y="3464879"/>
-                  </a:lnTo>
-                  <a:lnTo>
-                    <a:pt x="5371689" y="3462673"/>
-                  </a:lnTo>
-                  <a:lnTo>
-                    <a:pt x="5300066" y="3460209"/>
-                  </a:lnTo>
-                  <a:lnTo>
-                    <a:pt x="5228444" y="3457457"/>
-                  </a:lnTo>
-                  <a:lnTo>
-                    <a:pt x="5156821" y="3454383"/>
-                  </a:lnTo>
-                  <a:lnTo>
-                    <a:pt x="5085199" y="3450950"/>
-                  </a:lnTo>
-                  <a:lnTo>
-                    <a:pt x="5013576" y="3447115"/>
-                  </a:lnTo>
-                  <a:lnTo>
-                    <a:pt x="4941954" y="3442832"/>
-                  </a:lnTo>
-                  <a:lnTo>
-                    <a:pt x="4870331" y="3438048"/>
-                  </a:lnTo>
-                  <a:lnTo>
-                    <a:pt x="4798709" y="3432704"/>
-                  </a:lnTo>
-                  <a:lnTo>
-                    <a:pt x="4727086" y="3426736"/>
-                  </a:lnTo>
-                  <a:lnTo>
-                    <a:pt x="4655464" y="3420070"/>
-                  </a:lnTo>
-                  <a:lnTo>
-                    <a:pt x="4583841" y="3412625"/>
-                  </a:lnTo>
-                  <a:lnTo>
-                    <a:pt x="4512219" y="3404309"/>
-                  </a:lnTo>
-                  <a:lnTo>
-                    <a:pt x="4440596" y="3395020"/>
-                  </a:lnTo>
-                  <a:lnTo>
-                    <a:pt x="4368974" y="3384646"/>
-                  </a:lnTo>
-                  <a:lnTo>
-                    <a:pt x="4297351" y="3373058"/>
-                  </a:lnTo>
-                  <a:lnTo>
-                    <a:pt x="4225729" y="3360116"/>
-                  </a:lnTo>
-                  <a:lnTo>
-                    <a:pt x="4154106" y="3345660"/>
-                  </a:lnTo>
-                  <a:lnTo>
-                    <a:pt x="4082483" y="3329515"/>
-                  </a:lnTo>
-                  <a:lnTo>
-                    <a:pt x="4010861" y="3311481"/>
-                  </a:lnTo>
-                  <a:lnTo>
-                    <a:pt x="3939238" y="3291338"/>
-                  </a:lnTo>
-                  <a:lnTo>
-                    <a:pt x="3867616" y="3268841"/>
-                  </a:lnTo>
-                  <a:lnTo>
-                    <a:pt x="3795993" y="3243713"/>
-                  </a:lnTo>
-                  <a:lnTo>
-                    <a:pt x="3724371" y="3215646"/>
-                  </a:lnTo>
-                  <a:lnTo>
-                    <a:pt x="3652748" y="3184298"/>
-                  </a:lnTo>
-                  <a:lnTo>
-                    <a:pt x="3581126" y="3149285"/>
-                  </a:lnTo>
-                  <a:lnTo>
-                    <a:pt x="3509503" y="3110178"/>
-                  </a:lnTo>
-                  <a:lnTo>
-                    <a:pt x="3437881" y="3066498"/>
-                  </a:lnTo>
-                  <a:lnTo>
-                    <a:pt x="3366258" y="3017710"/>
-                  </a:lnTo>
-                  <a:lnTo>
-                    <a:pt x="3294636" y="2963219"/>
-                  </a:lnTo>
-                  <a:lnTo>
-                    <a:pt x="3223013" y="2902355"/>
-                  </a:lnTo>
-                  <a:lnTo>
-                    <a:pt x="3151391" y="2834375"/>
-                  </a:lnTo>
-                  <a:lnTo>
-                    <a:pt x="3079768" y="2758447"/>
-                  </a:lnTo>
-                  <a:lnTo>
-                    <a:pt x="3008146" y="2673640"/>
-                  </a:lnTo>
-                  <a:lnTo>
-                    <a:pt x="2936523" y="2682622"/>
-                  </a:lnTo>
-                  <a:lnTo>
-                    <a:pt x="2864901" y="2717262"/>
-                  </a:lnTo>
-                  <a:lnTo>
-                    <a:pt x="2793278" y="2750404"/>
-                  </a:lnTo>
-                  <a:lnTo>
-                    <a:pt x="2721655" y="2782113"/>
-                  </a:lnTo>
-                  <a:lnTo>
-                    <a:pt x="2650033" y="2812451"/>
-                  </a:lnTo>
-                  <a:lnTo>
-                    <a:pt x="2578410" y="2841477"/>
-                  </a:lnTo>
-                  <a:lnTo>
-                    <a:pt x="2506788" y="2869248"/>
-                  </a:lnTo>
-                  <a:lnTo>
-                    <a:pt x="2435165" y="2895819"/>
-                  </a:lnTo>
-                  <a:lnTo>
-                    <a:pt x="2363543" y="2921240"/>
-                  </a:lnTo>
-                  <a:lnTo>
-                    <a:pt x="2291920" y="2945563"/>
-                  </a:lnTo>
-                  <a:lnTo>
-                    <a:pt x="2220298" y="2968833"/>
-                  </a:lnTo>
-                  <a:lnTo>
-                    <a:pt x="2148675" y="2991098"/>
-                  </a:lnTo>
-                  <a:lnTo>
-                    <a:pt x="2077053" y="3012399"/>
-                  </a:lnTo>
-                  <a:lnTo>
-                    <a:pt x="2005430" y="3032780"/>
-                  </a:lnTo>
-                  <a:lnTo>
-                    <a:pt x="1933808" y="3052279"/>
-                  </a:lnTo>
-                  <a:lnTo>
-                    <a:pt x="1862185" y="3070936"/>
-                  </a:lnTo>
-                  <a:lnTo>
-                    <a:pt x="1790563" y="3088785"/>
-                  </a:lnTo>
-                  <a:lnTo>
-                    <a:pt x="1718940" y="3105863"/>
-                  </a:lnTo>
-                  <a:lnTo>
-                    <a:pt x="1647318" y="3122202"/>
-                  </a:lnTo>
-                  <a:lnTo>
-                    <a:pt x="1575695" y="3137835"/>
-                  </a:lnTo>
-                  <a:lnTo>
-                    <a:pt x="1504073" y="3152792"/>
-                  </a:lnTo>
-                  <a:lnTo>
-                    <a:pt x="1432450" y="3167102"/>
-                  </a:lnTo>
-                  <a:lnTo>
-                    <a:pt x="1360827" y="3180794"/>
-                  </a:lnTo>
-                  <a:lnTo>
-                    <a:pt x="1289205" y="3193893"/>
-                  </a:lnTo>
-                  <a:lnTo>
-                    <a:pt x="1217582" y="3206426"/>
-                  </a:lnTo>
-                  <a:lnTo>
-                    <a:pt x="1145960" y="3218417"/>
-                  </a:lnTo>
-                  <a:lnTo>
-                    <a:pt x="1074337" y="3229890"/>
-                  </a:lnTo>
-                  <a:lnTo>
-                    <a:pt x="1002715" y="3240866"/>
-                  </a:lnTo>
-                  <a:lnTo>
-                    <a:pt x="931092" y="3251368"/>
-                  </a:lnTo>
-                  <a:lnTo>
-                    <a:pt x="859470" y="3261416"/>
-                  </a:lnTo>
-                  <a:lnTo>
-                    <a:pt x="787847" y="3271029"/>
-                  </a:lnTo>
-                  <a:lnTo>
-                    <a:pt x="716225" y="3280227"/>
-                  </a:lnTo>
-                  <a:lnTo>
-                    <a:pt x="644602" y="3289027"/>
-                  </a:lnTo>
-                  <a:lnTo>
-                    <a:pt x="572980" y="3297447"/>
-                  </a:lnTo>
-                  <a:lnTo>
-                    <a:pt x="501357" y="3305502"/>
-                  </a:lnTo>
-                  <a:lnTo>
-                    <a:pt x="429735" y="3313209"/>
-                  </a:lnTo>
-                  <a:lnTo>
-                    <a:pt x="358112" y="3320583"/>
-                  </a:lnTo>
-                  <a:lnTo>
-                    <a:pt x="286490" y="3327638"/>
-                  </a:lnTo>
-                  <a:lnTo>
-                    <a:pt x="214867" y="3334388"/>
-                  </a:lnTo>
-                  <a:lnTo>
-                    <a:pt x="143245" y="3340846"/>
-                  </a:lnTo>
-                  <a:lnTo>
-                    <a:pt x="71622" y="3347025"/>
-                  </a:lnTo>
-                  <a:lnTo>
-                    <a:pt x="0" y="3352937"/>
+                    <a:pt x="7090630" y="3482235"/>
+                  </a:lnTo>
+                  <a:lnTo>
+                    <a:pt x="7019007" y="3482059"/>
+                  </a:lnTo>
+                  <a:lnTo>
+                    <a:pt x="6947385" y="3481862"/>
+                  </a:lnTo>
+                  <a:lnTo>
+                    <a:pt x="6875762" y="3481642"/>
+                  </a:lnTo>
+                  <a:lnTo>
+                    <a:pt x="6804139" y="3481396"/>
+                  </a:lnTo>
+                  <a:lnTo>
+                    <a:pt x="6732517" y="3481122"/>
+                  </a:lnTo>
+                  <a:lnTo>
+                    <a:pt x="6660894" y="3480815"/>
+                  </a:lnTo>
+                  <a:lnTo>
+                    <a:pt x="6589272" y="3480473"/>
+                  </a:lnTo>
+                  <a:lnTo>
+                    <a:pt x="6517649" y="3480091"/>
+                  </a:lnTo>
+                  <a:lnTo>
+                    <a:pt x="6446027" y="3479665"/>
+                  </a:lnTo>
+                  <a:lnTo>
+                    <a:pt x="6374404" y="3479188"/>
+                  </a:lnTo>
+                  <a:lnTo>
+                    <a:pt x="6302782" y="3478656"/>
+                  </a:lnTo>
+                  <a:lnTo>
+                    <a:pt x="6231159" y="3478062"/>
+                  </a:lnTo>
+                  <a:lnTo>
+                    <a:pt x="6159537" y="3477399"/>
+                  </a:lnTo>
+                  <a:lnTo>
+                    <a:pt x="6087914" y="3476658"/>
+                  </a:lnTo>
+                  <a:lnTo>
+                    <a:pt x="6016292" y="3475830"/>
+                  </a:lnTo>
+                  <a:lnTo>
+                    <a:pt x="5944669" y="3474906"/>
+                  </a:lnTo>
+                  <a:lnTo>
+                    <a:pt x="5873047" y="3473875"/>
+                  </a:lnTo>
+                  <a:lnTo>
+                    <a:pt x="5801424" y="3472722"/>
+                  </a:lnTo>
+                  <a:lnTo>
+                    <a:pt x="5729802" y="3471436"/>
+                  </a:lnTo>
+                  <a:lnTo>
+                    <a:pt x="5658179" y="3469999"/>
+                  </a:lnTo>
+                  <a:lnTo>
+                    <a:pt x="5586557" y="3468394"/>
+                  </a:lnTo>
+                  <a:lnTo>
+                    <a:pt x="5514934" y="3466602"/>
+                  </a:lnTo>
+                  <a:lnTo>
+                    <a:pt x="5443311" y="3464602"/>
+                  </a:lnTo>
+                  <a:lnTo>
+                    <a:pt x="5371689" y="3462367"/>
+                  </a:lnTo>
+                  <a:lnTo>
+                    <a:pt x="5300066" y="3459872"/>
+                  </a:lnTo>
+                  <a:lnTo>
+                    <a:pt x="5228444" y="3457085"/>
+                  </a:lnTo>
+                  <a:lnTo>
+                    <a:pt x="5156821" y="3453973"/>
+                  </a:lnTo>
+                  <a:lnTo>
+                    <a:pt x="5085199" y="3450499"/>
+                  </a:lnTo>
+                  <a:lnTo>
+                    <a:pt x="5013576" y="3446618"/>
+                  </a:lnTo>
+                  <a:lnTo>
+                    <a:pt x="4941954" y="3442285"/>
+                  </a:lnTo>
+                  <a:lnTo>
+                    <a:pt x="4870331" y="3437445"/>
+                  </a:lnTo>
+                  <a:lnTo>
+                    <a:pt x="4798709" y="3432041"/>
+                  </a:lnTo>
+                  <a:lnTo>
+                    <a:pt x="4727086" y="3426007"/>
+                  </a:lnTo>
+                  <a:lnTo>
+                    <a:pt x="4655464" y="3419268"/>
+                  </a:lnTo>
+                  <a:lnTo>
+                    <a:pt x="4583841" y="3411742"/>
+                  </a:lnTo>
+                  <a:lnTo>
+                    <a:pt x="4512219" y="3403338"/>
+                  </a:lnTo>
+                  <a:lnTo>
+                    <a:pt x="4440596" y="3393953"/>
+                  </a:lnTo>
+                  <a:lnTo>
+                    <a:pt x="4368974" y="3383473"/>
+                  </a:lnTo>
+                  <a:lnTo>
+                    <a:pt x="4297351" y="3371770"/>
+                  </a:lnTo>
+                  <a:lnTo>
+                    <a:pt x="4225729" y="3358700"/>
+                  </a:lnTo>
+                  <a:lnTo>
+                    <a:pt x="4154106" y="3344106"/>
+                  </a:lnTo>
+                  <a:lnTo>
+                    <a:pt x="4082483" y="3327808"/>
+                  </a:lnTo>
+                  <a:lnTo>
+                    <a:pt x="4010861" y="3309607"/>
+                  </a:lnTo>
+                  <a:lnTo>
+                    <a:pt x="3939238" y="3289283"/>
+                  </a:lnTo>
+                  <a:lnTo>
+                    <a:pt x="3867616" y="3266586"/>
+                  </a:lnTo>
+                  <a:lnTo>
+                    <a:pt x="3795993" y="3241240"/>
+                  </a:lnTo>
+                  <a:lnTo>
+                    <a:pt x="3724371" y="3212936"/>
+                  </a:lnTo>
+                  <a:lnTo>
+                    <a:pt x="3652748" y="3181328"/>
+                  </a:lnTo>
+                  <a:lnTo>
+                    <a:pt x="3581126" y="3146032"/>
+                  </a:lnTo>
+                  <a:lnTo>
+                    <a:pt x="3509503" y="3106616"/>
+                  </a:lnTo>
+                  <a:lnTo>
+                    <a:pt x="3437881" y="3062599"/>
+                  </a:lnTo>
+                  <a:lnTo>
+                    <a:pt x="3366258" y="3013445"/>
+                  </a:lnTo>
+                  <a:lnTo>
+                    <a:pt x="3294636" y="2958554"/>
+                  </a:lnTo>
+                  <a:lnTo>
+                    <a:pt x="3223013" y="2897256"/>
+                  </a:lnTo>
+                  <a:lnTo>
+                    <a:pt x="3151391" y="2828804"/>
+                  </a:lnTo>
+                  <a:lnTo>
+                    <a:pt x="3079768" y="2752363"/>
+                  </a:lnTo>
+                  <a:lnTo>
+                    <a:pt x="3008146" y="2667000"/>
+                  </a:lnTo>
+                  <a:lnTo>
+                    <a:pt x="2936523" y="2685058"/>
+                  </a:lnTo>
+                  <a:lnTo>
+                    <a:pt x="2864901" y="2719408"/>
+                  </a:lnTo>
+                  <a:lnTo>
+                    <a:pt x="2793278" y="2752282"/>
+                  </a:lnTo>
+                  <a:lnTo>
+                    <a:pt x="2721655" y="2783741"/>
+                  </a:lnTo>
+                  <a:lnTo>
+                    <a:pt x="2650033" y="2813847"/>
+                  </a:lnTo>
+                  <a:lnTo>
+                    <a:pt x="2578410" y="2842659"/>
+                  </a:lnTo>
+                  <a:lnTo>
+                    <a:pt x="2506788" y="2870231"/>
+                  </a:lnTo>
+                  <a:lnTo>
+                    <a:pt x="2435165" y="2896617"/>
+                  </a:lnTo>
+                  <a:lnTo>
+                    <a:pt x="2363543" y="2921869"/>
+                  </a:lnTo>
+                  <a:lnTo>
+                    <a:pt x="2291920" y="2946034"/>
+                  </a:lnTo>
+                  <a:lnTo>
+                    <a:pt x="2220298" y="2969161"/>
+                  </a:lnTo>
+                  <a:lnTo>
+                    <a:pt x="2148675" y="2991292"/>
+                  </a:lnTo>
+                  <a:lnTo>
+                    <a:pt x="2077053" y="3012472"/>
+                  </a:lnTo>
+                  <a:lnTo>
+                    <a:pt x="2005430" y="3032741"/>
+                  </a:lnTo>
+                  <a:lnTo>
+                    <a:pt x="1933808" y="3052138"/>
+                  </a:lnTo>
+                  <a:lnTo>
+                    <a:pt x="1862185" y="3070701"/>
+                  </a:lnTo>
+                  <a:lnTo>
+                    <a:pt x="1790563" y="3088465"/>
+                  </a:lnTo>
+                  <a:lnTo>
+                    <a:pt x="1718940" y="3105466"/>
+                  </a:lnTo>
+                  <a:lnTo>
+                    <a:pt x="1647318" y="3121735"/>
+                  </a:lnTo>
+                  <a:lnTo>
+                    <a:pt x="1575695" y="3137305"/>
+                  </a:lnTo>
+                  <a:lnTo>
+                    <a:pt x="1504073" y="3152205"/>
+                  </a:lnTo>
+                  <a:lnTo>
+                    <a:pt x="1432450" y="3166464"/>
+                  </a:lnTo>
+                  <a:lnTo>
+                    <a:pt x="1360827" y="3180110"/>
+                  </a:lnTo>
+                  <a:lnTo>
+                    <a:pt x="1289205" y="3193169"/>
+                  </a:lnTo>
+                  <a:lnTo>
+                    <a:pt x="1217582" y="3205666"/>
+                  </a:lnTo>
+                  <a:lnTo>
+                    <a:pt x="1145960" y="3217626"/>
+                  </a:lnTo>
+                  <a:lnTo>
+                    <a:pt x="1074337" y="3229071"/>
+                  </a:lnTo>
+                  <a:lnTo>
+                    <a:pt x="1002715" y="3240025"/>
+                  </a:lnTo>
+                  <a:lnTo>
+                    <a:pt x="931092" y="3250507"/>
+                  </a:lnTo>
+                  <a:lnTo>
+                    <a:pt x="859470" y="3260538"/>
+                  </a:lnTo>
+                  <a:lnTo>
+                    <a:pt x="787847" y="3270138"/>
+                  </a:lnTo>
+                  <a:lnTo>
+                    <a:pt x="716225" y="3279325"/>
+                  </a:lnTo>
+                  <a:lnTo>
+                    <a:pt x="644602" y="3288117"/>
+                  </a:lnTo>
+                  <a:lnTo>
+                    <a:pt x="572980" y="3296531"/>
+                  </a:lnTo>
+                  <a:lnTo>
+                    <a:pt x="501357" y="3304582"/>
+                  </a:lnTo>
+                  <a:lnTo>
+                    <a:pt x="429735" y="3312288"/>
+                  </a:lnTo>
+                  <a:lnTo>
+                    <a:pt x="358112" y="3319662"/>
+                  </a:lnTo>
+                  <a:lnTo>
+                    <a:pt x="286490" y="3326719"/>
+                  </a:lnTo>
+                  <a:lnTo>
+                    <a:pt x="214867" y="3333473"/>
+                  </a:lnTo>
+                  <a:lnTo>
+                    <a:pt x="143245" y="3339936"/>
+                  </a:lnTo>
+                  <a:lnTo>
+                    <a:pt x="71622" y="3346121"/>
+                  </a:lnTo>
+                  <a:lnTo>
+                    <a:pt x="0" y="3352040"/>
                   </a:lnTo>
                   <a:lnTo>
                     <a:pt x="0" y="0"/>
@@ -3870,156 +3870,156 @@
           </p:nvSpPr>
           <p:spPr>
             <a:xfrm>
-              <a:off x="3236008" y="2073503"/>
-              <a:ext cx="3253938" cy="2646417"/>
+              <a:off x="3239547" y="2073503"/>
+              <a:ext cx="3268318" cy="2649164"/>
             </a:xfrm>
             <a:custGeom>
               <a:avLst/>
               <a:pathLst>
-                <a:path w="3253938" h="2646417">
+                <a:path w="3268318" h="2649164">
                   <a:moveTo>
                     <a:pt x="0" y="0"/>
                   </a:moveTo>
                   <a:lnTo>
-                    <a:pt x="13093" y="72909"/>
-                  </a:lnTo>
-                  <a:lnTo>
-                    <a:pt x="84716" y="429975"/>
-                  </a:lnTo>
-                  <a:lnTo>
-                    <a:pt x="156338" y="749662"/>
-                  </a:lnTo>
-                  <a:lnTo>
-                    <a:pt x="227961" y="1035882"/>
-                  </a:lnTo>
-                  <a:lnTo>
-                    <a:pt x="299583" y="1292138"/>
-                  </a:lnTo>
-                  <a:lnTo>
-                    <a:pt x="371206" y="1521569"/>
-                  </a:lnTo>
-                  <a:lnTo>
-                    <a:pt x="442828" y="1726981"/>
-                  </a:lnTo>
-                  <a:lnTo>
-                    <a:pt x="514451" y="1910889"/>
-                  </a:lnTo>
-                  <a:lnTo>
-                    <a:pt x="586073" y="2075545"/>
-                  </a:lnTo>
-                  <a:lnTo>
-                    <a:pt x="657696" y="2222964"/>
-                  </a:lnTo>
-                  <a:lnTo>
-                    <a:pt x="729318" y="2354950"/>
-                  </a:lnTo>
-                  <a:lnTo>
-                    <a:pt x="800941" y="2473119"/>
-                  </a:lnTo>
-                  <a:lnTo>
-                    <a:pt x="872563" y="2578917"/>
-                  </a:lnTo>
-                  <a:lnTo>
-                    <a:pt x="944186" y="2646417"/>
-                  </a:lnTo>
-                  <a:lnTo>
-                    <a:pt x="1015809" y="2608575"/>
-                  </a:lnTo>
-                  <a:lnTo>
-                    <a:pt x="1087431" y="2569023"/>
-                  </a:lnTo>
-                  <a:lnTo>
-                    <a:pt x="1159054" y="2527684"/>
-                  </a:lnTo>
-                  <a:lnTo>
-                    <a:pt x="1230676" y="2484476"/>
-                  </a:lnTo>
-                  <a:lnTo>
-                    <a:pt x="1302299" y="2439316"/>
-                  </a:lnTo>
-                  <a:lnTo>
-                    <a:pt x="1373921" y="2392115"/>
-                  </a:lnTo>
-                  <a:lnTo>
-                    <a:pt x="1445544" y="2342780"/>
-                  </a:lnTo>
-                  <a:lnTo>
-                    <a:pt x="1517166" y="2291216"/>
-                  </a:lnTo>
-                  <a:lnTo>
-                    <a:pt x="1588789" y="2237322"/>
-                  </a:lnTo>
-                  <a:lnTo>
-                    <a:pt x="1660411" y="2180992"/>
-                  </a:lnTo>
-                  <a:lnTo>
-                    <a:pt x="1732034" y="2122117"/>
-                  </a:lnTo>
-                  <a:lnTo>
-                    <a:pt x="1803656" y="2060580"/>
-                  </a:lnTo>
-                  <a:lnTo>
-                    <a:pt x="1875279" y="1996263"/>
-                  </a:lnTo>
-                  <a:lnTo>
-                    <a:pt x="1946901" y="1929038"/>
-                  </a:lnTo>
-                  <a:lnTo>
-                    <a:pt x="2018524" y="1858776"/>
-                  </a:lnTo>
-                  <a:lnTo>
-                    <a:pt x="2090146" y="1785338"/>
-                  </a:lnTo>
-                  <a:lnTo>
-                    <a:pt x="2161769" y="1708582"/>
-                  </a:lnTo>
-                  <a:lnTo>
-                    <a:pt x="2233391" y="1628356"/>
-                  </a:lnTo>
-                  <a:lnTo>
-                    <a:pt x="2305014" y="1544505"/>
-                  </a:lnTo>
-                  <a:lnTo>
-                    <a:pt x="2376637" y="1456865"/>
-                  </a:lnTo>
-                  <a:lnTo>
-                    <a:pt x="2448259" y="1365263"/>
-                  </a:lnTo>
-                  <a:lnTo>
-                    <a:pt x="2519882" y="1269522"/>
-                  </a:lnTo>
-                  <a:lnTo>
-                    <a:pt x="2591504" y="1169454"/>
-                  </a:lnTo>
-                  <a:lnTo>
-                    <a:pt x="2663127" y="1064864"/>
-                  </a:lnTo>
-                  <a:lnTo>
-                    <a:pt x="2734749" y="955547"/>
-                  </a:lnTo>
-                  <a:lnTo>
-                    <a:pt x="2806372" y="841289"/>
-                  </a:lnTo>
-                  <a:lnTo>
-                    <a:pt x="2877994" y="721868"/>
-                  </a:lnTo>
-                  <a:lnTo>
-                    <a:pt x="2949617" y="597050"/>
-                  </a:lnTo>
-                  <a:lnTo>
-                    <a:pt x="3021239" y="466590"/>
-                  </a:lnTo>
-                  <a:lnTo>
-                    <a:pt x="3092862" y="330235"/>
-                  </a:lnTo>
-                  <a:lnTo>
-                    <a:pt x="3164484" y="187718"/>
-                  </a:lnTo>
-                  <a:lnTo>
-                    <a:pt x="3236107" y="38760"/>
-                  </a:lnTo>
-                  <a:lnTo>
-                    <a:pt x="3253938" y="0"/>
+                    <a:pt x="9555" y="53414"/>
+                  </a:lnTo>
+                  <a:lnTo>
+                    <a:pt x="81177" y="411939"/>
+                  </a:lnTo>
+                  <a:lnTo>
+                    <a:pt x="152800" y="732992"/>
+                  </a:lnTo>
+                  <a:lnTo>
+                    <a:pt x="224423" y="1020490"/>
+                  </a:lnTo>
+                  <a:lnTo>
+                    <a:pt x="296045" y="1277940"/>
+                  </a:lnTo>
+                  <a:lnTo>
+                    <a:pt x="367668" y="1508483"/>
+                  </a:lnTo>
+                  <a:lnTo>
+                    <a:pt x="439290" y="1714929"/>
+                  </a:lnTo>
+                  <a:lnTo>
+                    <a:pt x="510913" y="1899799"/>
+                  </a:lnTo>
+                  <a:lnTo>
+                    <a:pt x="582535" y="2065347"/>
+                  </a:lnTo>
+                  <a:lnTo>
+                    <a:pt x="654158" y="2213593"/>
+                  </a:lnTo>
+                  <a:lnTo>
+                    <a:pt x="725780" y="2346344"/>
+                  </a:lnTo>
+                  <a:lnTo>
+                    <a:pt x="797403" y="2465221"/>
+                  </a:lnTo>
+                  <a:lnTo>
+                    <a:pt x="869025" y="2571673"/>
+                  </a:lnTo>
+                  <a:lnTo>
+                    <a:pt x="940648" y="2649164"/>
+                  </a:lnTo>
+                  <a:lnTo>
+                    <a:pt x="1012270" y="2611656"/>
+                  </a:lnTo>
+                  <a:lnTo>
+                    <a:pt x="1083893" y="2572463"/>
+                  </a:lnTo>
+                  <a:lnTo>
+                    <a:pt x="1155515" y="2531509"/>
+                  </a:lnTo>
+                  <a:lnTo>
+                    <a:pt x="1227138" y="2488714"/>
+                  </a:lnTo>
+                  <a:lnTo>
+                    <a:pt x="1298760" y="2443996"/>
+                  </a:lnTo>
+                  <a:lnTo>
+                    <a:pt x="1370383" y="2397268"/>
+                  </a:lnTo>
+                  <a:lnTo>
+                    <a:pt x="1442005" y="2348440"/>
+                  </a:lnTo>
+                  <a:lnTo>
+                    <a:pt x="1513628" y="2297418"/>
+                  </a:lnTo>
+                  <a:lnTo>
+                    <a:pt x="1585251" y="2244102"/>
+                  </a:lnTo>
+                  <a:lnTo>
+                    <a:pt x="1656873" y="2188391"/>
+                  </a:lnTo>
+                  <a:lnTo>
+                    <a:pt x="1728496" y="2130176"/>
+                  </a:lnTo>
+                  <a:lnTo>
+                    <a:pt x="1800118" y="2069344"/>
+                  </a:lnTo>
+                  <a:lnTo>
+                    <a:pt x="1871741" y="2005779"/>
+                  </a:lnTo>
+                  <a:lnTo>
+                    <a:pt x="1943363" y="1939357"/>
+                  </a:lnTo>
+                  <a:lnTo>
+                    <a:pt x="2014986" y="1869950"/>
+                  </a:lnTo>
+                  <a:lnTo>
+                    <a:pt x="2086608" y="1797423"/>
+                  </a:lnTo>
+                  <a:lnTo>
+                    <a:pt x="2158231" y="1721637"/>
+                  </a:lnTo>
+                  <a:lnTo>
+                    <a:pt x="2229853" y="1642446"/>
+                  </a:lnTo>
+                  <a:lnTo>
+                    <a:pt x="2301476" y="1559695"/>
+                  </a:lnTo>
+                  <a:lnTo>
+                    <a:pt x="2373098" y="1473225"/>
+                  </a:lnTo>
+                  <a:lnTo>
+                    <a:pt x="2444721" y="1382869"/>
+                  </a:lnTo>
+                  <a:lnTo>
+                    <a:pt x="2516343" y="1288453"/>
+                  </a:lnTo>
+                  <a:lnTo>
+                    <a:pt x="2587966" y="1189793"/>
+                  </a:lnTo>
+                  <a:lnTo>
+                    <a:pt x="2659588" y="1086700"/>
+                  </a:lnTo>
+                  <a:lnTo>
+                    <a:pt x="2731211" y="978973"/>
+                  </a:lnTo>
+                  <a:lnTo>
+                    <a:pt x="2802833" y="866405"/>
+                  </a:lnTo>
+                  <a:lnTo>
+                    <a:pt x="2874456" y="748777"/>
+                  </a:lnTo>
+                  <a:lnTo>
+                    <a:pt x="2946079" y="625864"/>
+                  </a:lnTo>
+                  <a:lnTo>
+                    <a:pt x="3017701" y="497426"/>
+                  </a:lnTo>
+                  <a:lnTo>
+                    <a:pt x="3089324" y="363217"/>
+                  </a:lnTo>
+                  <a:lnTo>
+                    <a:pt x="3160946" y="222976"/>
+                  </a:lnTo>
+                  <a:lnTo>
+                    <a:pt x="3232569" y="76432"/>
+                  </a:lnTo>
+                  <a:lnTo>
+                    <a:pt x="3268318" y="0"/>
                   </a:lnTo>
                 </a:path>
               </a:pathLst>
@@ -4039,312 +4039,312 @@
           </p:nvSpPr>
           <p:spPr>
             <a:xfrm>
-              <a:off x="1172049" y="4747143"/>
-              <a:ext cx="7090630" cy="808623"/>
+              <a:off x="1172049" y="4740503"/>
+              <a:ext cx="7090630" cy="815235"/>
             </a:xfrm>
             <a:custGeom>
               <a:avLst/>
               <a:pathLst>
-                <a:path w="7090630" h="808623">
+                <a:path w="7090630" h="815235">
                   <a:moveTo>
-                    <a:pt x="7090630" y="808623"/>
+                    <a:pt x="7090630" y="815235"/>
                   </a:moveTo>
                   <a:lnTo>
-                    <a:pt x="7019007" y="808450"/>
-                  </a:lnTo>
-                  <a:lnTo>
-                    <a:pt x="6947385" y="808256"/>
-                  </a:lnTo>
-                  <a:lnTo>
-                    <a:pt x="6875762" y="808040"/>
-                  </a:lnTo>
-                  <a:lnTo>
-                    <a:pt x="6804139" y="807798"/>
-                  </a:lnTo>
-                  <a:lnTo>
-                    <a:pt x="6732517" y="807528"/>
-                  </a:lnTo>
-                  <a:lnTo>
-                    <a:pt x="6660894" y="807227"/>
-                  </a:lnTo>
-                  <a:lnTo>
-                    <a:pt x="6589272" y="806890"/>
-                  </a:lnTo>
-                  <a:lnTo>
-                    <a:pt x="6517649" y="806514"/>
-                  </a:lnTo>
-                  <a:lnTo>
-                    <a:pt x="6446027" y="806094"/>
-                  </a:lnTo>
-                  <a:lnTo>
-                    <a:pt x="6374404" y="805625"/>
-                  </a:lnTo>
-                  <a:lnTo>
-                    <a:pt x="6302782" y="805101"/>
-                  </a:lnTo>
-                  <a:lnTo>
-                    <a:pt x="6231159" y="804516"/>
-                  </a:lnTo>
-                  <a:lnTo>
-                    <a:pt x="6159537" y="803862"/>
-                  </a:lnTo>
-                  <a:lnTo>
-                    <a:pt x="6087914" y="803132"/>
-                  </a:lnTo>
-                  <a:lnTo>
-                    <a:pt x="6016292" y="802316"/>
-                  </a:lnTo>
-                  <a:lnTo>
-                    <a:pt x="5944669" y="801406"/>
-                  </a:lnTo>
-                  <a:lnTo>
-                    <a:pt x="5873047" y="800388"/>
-                  </a:lnTo>
-                  <a:lnTo>
-                    <a:pt x="5801424" y="799252"/>
-                  </a:lnTo>
-                  <a:lnTo>
-                    <a:pt x="5729802" y="797983"/>
-                  </a:lnTo>
-                  <a:lnTo>
-                    <a:pt x="5658179" y="796565"/>
-                  </a:lnTo>
-                  <a:lnTo>
-                    <a:pt x="5586557" y="794982"/>
-                  </a:lnTo>
-                  <a:lnTo>
-                    <a:pt x="5514934" y="793214"/>
-                  </a:lnTo>
-                  <a:lnTo>
-                    <a:pt x="5443311" y="791239"/>
-                  </a:lnTo>
-                  <a:lnTo>
-                    <a:pt x="5371689" y="789033"/>
-                  </a:lnTo>
-                  <a:lnTo>
-                    <a:pt x="5300066" y="786569"/>
-                  </a:lnTo>
-                  <a:lnTo>
-                    <a:pt x="5228444" y="783817"/>
-                  </a:lnTo>
-                  <a:lnTo>
-                    <a:pt x="5156821" y="780743"/>
-                  </a:lnTo>
-                  <a:lnTo>
-                    <a:pt x="5085199" y="777309"/>
-                  </a:lnTo>
-                  <a:lnTo>
-                    <a:pt x="5013576" y="773474"/>
-                  </a:lnTo>
-                  <a:lnTo>
-                    <a:pt x="4941954" y="769191"/>
-                  </a:lnTo>
-                  <a:lnTo>
-                    <a:pt x="4870331" y="764407"/>
-                  </a:lnTo>
-                  <a:lnTo>
-                    <a:pt x="4798709" y="759064"/>
-                  </a:lnTo>
-                  <a:lnTo>
-                    <a:pt x="4727086" y="753096"/>
-                  </a:lnTo>
-                  <a:lnTo>
-                    <a:pt x="4655464" y="746430"/>
-                  </a:lnTo>
-                  <a:lnTo>
-                    <a:pt x="4583841" y="738984"/>
-                  </a:lnTo>
-                  <a:lnTo>
-                    <a:pt x="4512219" y="730668"/>
-                  </a:lnTo>
-                  <a:lnTo>
-                    <a:pt x="4440596" y="721380"/>
-                  </a:lnTo>
-                  <a:lnTo>
-                    <a:pt x="4368974" y="711005"/>
-                  </a:lnTo>
-                  <a:lnTo>
-                    <a:pt x="4297351" y="699418"/>
-                  </a:lnTo>
-                  <a:lnTo>
-                    <a:pt x="4225729" y="686476"/>
-                  </a:lnTo>
-                  <a:lnTo>
-                    <a:pt x="4154106" y="672020"/>
-                  </a:lnTo>
-                  <a:lnTo>
-                    <a:pt x="4082483" y="655874"/>
-                  </a:lnTo>
-                  <a:lnTo>
-                    <a:pt x="4010861" y="637840"/>
-                  </a:lnTo>
-                  <a:lnTo>
-                    <a:pt x="3939238" y="617698"/>
-                  </a:lnTo>
-                  <a:lnTo>
-                    <a:pt x="3867616" y="595200"/>
-                  </a:lnTo>
-                  <a:lnTo>
-                    <a:pt x="3795993" y="570072"/>
-                  </a:lnTo>
-                  <a:lnTo>
-                    <a:pt x="3724371" y="542006"/>
-                  </a:lnTo>
-                  <a:lnTo>
-                    <a:pt x="3652748" y="510658"/>
-                  </a:lnTo>
-                  <a:lnTo>
-                    <a:pt x="3581126" y="475645"/>
-                  </a:lnTo>
-                  <a:lnTo>
-                    <a:pt x="3509503" y="436537"/>
-                  </a:lnTo>
-                  <a:lnTo>
-                    <a:pt x="3437881" y="392857"/>
-                  </a:lnTo>
-                  <a:lnTo>
-                    <a:pt x="3366258" y="344070"/>
-                  </a:lnTo>
-                  <a:lnTo>
-                    <a:pt x="3294636" y="289578"/>
-                  </a:lnTo>
-                  <a:lnTo>
-                    <a:pt x="3223013" y="228715"/>
-                  </a:lnTo>
-                  <a:lnTo>
-                    <a:pt x="3151391" y="160735"/>
-                  </a:lnTo>
-                  <a:lnTo>
-                    <a:pt x="3079768" y="84806"/>
+                    <a:pt x="7019007" y="815059"/>
+                  </a:lnTo>
+                  <a:lnTo>
+                    <a:pt x="6947385" y="814862"/>
+                  </a:lnTo>
+                  <a:lnTo>
+                    <a:pt x="6875762" y="814642"/>
+                  </a:lnTo>
+                  <a:lnTo>
+                    <a:pt x="6804139" y="814396"/>
+                  </a:lnTo>
+                  <a:lnTo>
+                    <a:pt x="6732517" y="814122"/>
+                  </a:lnTo>
+                  <a:lnTo>
+                    <a:pt x="6660894" y="813815"/>
+                  </a:lnTo>
+                  <a:lnTo>
+                    <a:pt x="6589272" y="813473"/>
+                  </a:lnTo>
+                  <a:lnTo>
+                    <a:pt x="6517649" y="813091"/>
+                  </a:lnTo>
+                  <a:lnTo>
+                    <a:pt x="6446027" y="812664"/>
+                  </a:lnTo>
+                  <a:lnTo>
+                    <a:pt x="6374404" y="812188"/>
+                  </a:lnTo>
+                  <a:lnTo>
+                    <a:pt x="6302782" y="811656"/>
+                  </a:lnTo>
+                  <a:lnTo>
+                    <a:pt x="6231159" y="811062"/>
+                  </a:lnTo>
+                  <a:lnTo>
+                    <a:pt x="6159537" y="810398"/>
+                  </a:lnTo>
+                  <a:lnTo>
+                    <a:pt x="6087914" y="809658"/>
+                  </a:lnTo>
+                  <a:lnTo>
+                    <a:pt x="6016292" y="808830"/>
+                  </a:lnTo>
+                  <a:lnTo>
+                    <a:pt x="5944669" y="807906"/>
+                  </a:lnTo>
+                  <a:lnTo>
+                    <a:pt x="5873047" y="806874"/>
+                  </a:lnTo>
+                  <a:lnTo>
+                    <a:pt x="5801424" y="805722"/>
+                  </a:lnTo>
+                  <a:lnTo>
+                    <a:pt x="5729802" y="804436"/>
+                  </a:lnTo>
+                  <a:lnTo>
+                    <a:pt x="5658179" y="802999"/>
+                  </a:lnTo>
+                  <a:lnTo>
+                    <a:pt x="5586557" y="801394"/>
+                  </a:lnTo>
+                  <a:lnTo>
+                    <a:pt x="5514934" y="799602"/>
+                  </a:lnTo>
+                  <a:lnTo>
+                    <a:pt x="5443311" y="797601"/>
+                  </a:lnTo>
+                  <a:lnTo>
+                    <a:pt x="5371689" y="795367"/>
+                  </a:lnTo>
+                  <a:lnTo>
+                    <a:pt x="5300066" y="792872"/>
+                  </a:lnTo>
+                  <a:lnTo>
+                    <a:pt x="5228444" y="790085"/>
+                  </a:lnTo>
+                  <a:lnTo>
+                    <a:pt x="5156821" y="786973"/>
+                  </a:lnTo>
+                  <a:lnTo>
+                    <a:pt x="5085199" y="783499"/>
+                  </a:lnTo>
+                  <a:lnTo>
+                    <a:pt x="5013576" y="779618"/>
+                  </a:lnTo>
+                  <a:lnTo>
+                    <a:pt x="4941954" y="775285"/>
+                  </a:lnTo>
+                  <a:lnTo>
+                    <a:pt x="4870331" y="770445"/>
+                  </a:lnTo>
+                  <a:lnTo>
+                    <a:pt x="4798709" y="765041"/>
+                  </a:lnTo>
+                  <a:lnTo>
+                    <a:pt x="4727086" y="759007"/>
+                  </a:lnTo>
+                  <a:lnTo>
+                    <a:pt x="4655464" y="752268"/>
+                  </a:lnTo>
+                  <a:lnTo>
+                    <a:pt x="4583841" y="744742"/>
+                  </a:lnTo>
+                  <a:lnTo>
+                    <a:pt x="4512219" y="736338"/>
+                  </a:lnTo>
+                  <a:lnTo>
+                    <a:pt x="4440596" y="726953"/>
+                  </a:lnTo>
+                  <a:lnTo>
+                    <a:pt x="4368974" y="716473"/>
+                  </a:lnTo>
+                  <a:lnTo>
+                    <a:pt x="4297351" y="704770"/>
+                  </a:lnTo>
+                  <a:lnTo>
+                    <a:pt x="4225729" y="691700"/>
+                  </a:lnTo>
+                  <a:lnTo>
+                    <a:pt x="4154106" y="677106"/>
+                  </a:lnTo>
+                  <a:lnTo>
+                    <a:pt x="4082483" y="660807"/>
+                  </a:lnTo>
+                  <a:lnTo>
+                    <a:pt x="4010861" y="642607"/>
+                  </a:lnTo>
+                  <a:lnTo>
+                    <a:pt x="3939238" y="622283"/>
+                  </a:lnTo>
+                  <a:lnTo>
+                    <a:pt x="3867616" y="599586"/>
+                  </a:lnTo>
+                  <a:lnTo>
+                    <a:pt x="3795993" y="574240"/>
+                  </a:lnTo>
+                  <a:lnTo>
+                    <a:pt x="3724371" y="545936"/>
+                  </a:lnTo>
+                  <a:lnTo>
+                    <a:pt x="3652748" y="514328"/>
+                  </a:lnTo>
+                  <a:lnTo>
+                    <a:pt x="3581126" y="479032"/>
+                  </a:lnTo>
+                  <a:lnTo>
+                    <a:pt x="3509503" y="439616"/>
+                  </a:lnTo>
+                  <a:lnTo>
+                    <a:pt x="3437881" y="395599"/>
+                  </a:lnTo>
+                  <a:lnTo>
+                    <a:pt x="3366258" y="346445"/>
+                  </a:lnTo>
+                  <a:lnTo>
+                    <a:pt x="3294636" y="291554"/>
+                  </a:lnTo>
+                  <a:lnTo>
+                    <a:pt x="3223013" y="230256"/>
+                  </a:lnTo>
+                  <a:lnTo>
+                    <a:pt x="3151391" y="161804"/>
+                  </a:lnTo>
+                  <a:lnTo>
+                    <a:pt x="3079768" y="85363"/>
                   </a:lnTo>
                   <a:lnTo>
                     <a:pt x="3008146" y="0"/>
                   </a:lnTo>
                   <a:lnTo>
-                    <a:pt x="2936523" y="8982"/>
-                  </a:lnTo>
-                  <a:lnTo>
-                    <a:pt x="2864901" y="43621"/>
-                  </a:lnTo>
-                  <a:lnTo>
-                    <a:pt x="2793278" y="76764"/>
-                  </a:lnTo>
-                  <a:lnTo>
-                    <a:pt x="2721655" y="108473"/>
-                  </a:lnTo>
-                  <a:lnTo>
-                    <a:pt x="2650033" y="138811"/>
-                  </a:lnTo>
-                  <a:lnTo>
-                    <a:pt x="2578410" y="167837"/>
-                  </a:lnTo>
-                  <a:lnTo>
-                    <a:pt x="2506788" y="195608"/>
-                  </a:lnTo>
-                  <a:lnTo>
-                    <a:pt x="2435165" y="222178"/>
-                  </a:lnTo>
-                  <a:lnTo>
-                    <a:pt x="2363543" y="247600"/>
-                  </a:lnTo>
-                  <a:lnTo>
-                    <a:pt x="2291920" y="271922"/>
-                  </a:lnTo>
-                  <a:lnTo>
-                    <a:pt x="2220298" y="295193"/>
-                  </a:lnTo>
-                  <a:lnTo>
-                    <a:pt x="2148675" y="317457"/>
-                  </a:lnTo>
-                  <a:lnTo>
-                    <a:pt x="2077053" y="338759"/>
-                  </a:lnTo>
-                  <a:lnTo>
-                    <a:pt x="2005430" y="359140"/>
-                  </a:lnTo>
-                  <a:lnTo>
-                    <a:pt x="1933808" y="378639"/>
-                  </a:lnTo>
-                  <a:lnTo>
-                    <a:pt x="1862185" y="397295"/>
-                  </a:lnTo>
-                  <a:lnTo>
-                    <a:pt x="1790563" y="415145"/>
-                  </a:lnTo>
-                  <a:lnTo>
-                    <a:pt x="1718940" y="432223"/>
-                  </a:lnTo>
-                  <a:lnTo>
-                    <a:pt x="1647318" y="448562"/>
-                  </a:lnTo>
-                  <a:lnTo>
-                    <a:pt x="1575695" y="464195"/>
-                  </a:lnTo>
-                  <a:lnTo>
-                    <a:pt x="1504073" y="479152"/>
-                  </a:lnTo>
-                  <a:lnTo>
-                    <a:pt x="1432450" y="493462"/>
-                  </a:lnTo>
-                  <a:lnTo>
-                    <a:pt x="1360827" y="507153"/>
-                  </a:lnTo>
-                  <a:lnTo>
-                    <a:pt x="1289205" y="520253"/>
-                  </a:lnTo>
-                  <a:lnTo>
-                    <a:pt x="1217582" y="532786"/>
-                  </a:lnTo>
-                  <a:lnTo>
-                    <a:pt x="1145960" y="544777"/>
-                  </a:lnTo>
-                  <a:lnTo>
-                    <a:pt x="1074337" y="556249"/>
-                  </a:lnTo>
-                  <a:lnTo>
-                    <a:pt x="1002715" y="567226"/>
-                  </a:lnTo>
-                  <a:lnTo>
-                    <a:pt x="931092" y="577728"/>
-                  </a:lnTo>
-                  <a:lnTo>
-                    <a:pt x="859470" y="587776"/>
-                  </a:lnTo>
-                  <a:lnTo>
-                    <a:pt x="787847" y="597389"/>
-                  </a:lnTo>
-                  <a:lnTo>
-                    <a:pt x="716225" y="606587"/>
-                  </a:lnTo>
-                  <a:lnTo>
-                    <a:pt x="644602" y="615387"/>
-                  </a:lnTo>
-                  <a:lnTo>
-                    <a:pt x="572980" y="623806"/>
-                  </a:lnTo>
-                  <a:lnTo>
-                    <a:pt x="501357" y="631862"/>
-                  </a:lnTo>
-                  <a:lnTo>
-                    <a:pt x="429735" y="639569"/>
-                  </a:lnTo>
-                  <a:lnTo>
-                    <a:pt x="358112" y="646943"/>
-                  </a:lnTo>
-                  <a:lnTo>
-                    <a:pt x="286490" y="653998"/>
-                  </a:lnTo>
-                  <a:lnTo>
-                    <a:pt x="214867" y="660748"/>
-                  </a:lnTo>
-                  <a:lnTo>
-                    <a:pt x="143245" y="667206"/>
-                  </a:lnTo>
-                  <a:lnTo>
-                    <a:pt x="71622" y="673385"/>
-                  </a:lnTo>
-                  <a:lnTo>
-                    <a:pt x="0" y="679296"/>
+                    <a:pt x="2936523" y="18058"/>
+                  </a:lnTo>
+                  <a:lnTo>
+                    <a:pt x="2864901" y="52408"/>
+                  </a:lnTo>
+                  <a:lnTo>
+                    <a:pt x="2793278" y="85282"/>
+                  </a:lnTo>
+                  <a:lnTo>
+                    <a:pt x="2721655" y="116741"/>
+                  </a:lnTo>
+                  <a:lnTo>
+                    <a:pt x="2650033" y="146847"/>
+                  </a:lnTo>
+                  <a:lnTo>
+                    <a:pt x="2578410" y="175658"/>
+                  </a:lnTo>
+                  <a:lnTo>
+                    <a:pt x="2506788" y="203231"/>
+                  </a:lnTo>
+                  <a:lnTo>
+                    <a:pt x="2435165" y="229617"/>
+                  </a:lnTo>
+                  <a:lnTo>
+                    <a:pt x="2363543" y="254869"/>
+                  </a:lnTo>
+                  <a:lnTo>
+                    <a:pt x="2291920" y="279034"/>
+                  </a:lnTo>
+                  <a:lnTo>
+                    <a:pt x="2220298" y="302161"/>
+                  </a:lnTo>
+                  <a:lnTo>
+                    <a:pt x="2148675" y="324292"/>
+                  </a:lnTo>
+                  <a:lnTo>
+                    <a:pt x="2077053" y="345472"/>
+                  </a:lnTo>
+                  <a:lnTo>
+                    <a:pt x="2005430" y="365741"/>
+                  </a:lnTo>
+                  <a:lnTo>
+                    <a:pt x="1933808" y="385138"/>
+                  </a:lnTo>
+                  <a:lnTo>
+                    <a:pt x="1862185" y="403701"/>
+                  </a:lnTo>
+                  <a:lnTo>
+                    <a:pt x="1790563" y="421465"/>
+                  </a:lnTo>
+                  <a:lnTo>
+                    <a:pt x="1718940" y="438466"/>
+                  </a:lnTo>
+                  <a:lnTo>
+                    <a:pt x="1647318" y="454735"/>
+                  </a:lnTo>
+                  <a:lnTo>
+                    <a:pt x="1575695" y="470305"/>
+                  </a:lnTo>
+                  <a:lnTo>
+                    <a:pt x="1504073" y="485205"/>
+                  </a:lnTo>
+                  <a:lnTo>
+                    <a:pt x="1432450" y="499464"/>
+                  </a:lnTo>
+                  <a:lnTo>
+                    <a:pt x="1360827" y="513110"/>
+                  </a:lnTo>
+                  <a:lnTo>
+                    <a:pt x="1289205" y="526169"/>
+                  </a:lnTo>
+                  <a:lnTo>
+                    <a:pt x="1217582" y="538666"/>
+                  </a:lnTo>
+                  <a:lnTo>
+                    <a:pt x="1145960" y="550626"/>
+                  </a:lnTo>
+                  <a:lnTo>
+                    <a:pt x="1074337" y="562071"/>
+                  </a:lnTo>
+                  <a:lnTo>
+                    <a:pt x="1002715" y="573025"/>
+                  </a:lnTo>
+                  <a:lnTo>
+                    <a:pt x="931092" y="583507"/>
+                  </a:lnTo>
+                  <a:lnTo>
+                    <a:pt x="859470" y="593538"/>
+                  </a:lnTo>
+                  <a:lnTo>
+                    <a:pt x="787847" y="603138"/>
+                  </a:lnTo>
+                  <a:lnTo>
+                    <a:pt x="716225" y="612325"/>
+                  </a:lnTo>
+                  <a:lnTo>
+                    <a:pt x="644602" y="621117"/>
+                  </a:lnTo>
+                  <a:lnTo>
+                    <a:pt x="572980" y="629531"/>
+                  </a:lnTo>
+                  <a:lnTo>
+                    <a:pt x="501357" y="637582"/>
+                  </a:lnTo>
+                  <a:lnTo>
+                    <a:pt x="429735" y="645288"/>
+                  </a:lnTo>
+                  <a:lnTo>
+                    <a:pt x="358112" y="652662"/>
+                  </a:lnTo>
+                  <a:lnTo>
+                    <a:pt x="286490" y="659719"/>
+                  </a:lnTo>
+                  <a:lnTo>
+                    <a:pt x="214867" y="666473"/>
+                  </a:lnTo>
+                  <a:lnTo>
+                    <a:pt x="143245" y="672936"/>
+                  </a:lnTo>
+                  <a:lnTo>
+                    <a:pt x="71622" y="679121"/>
+                  </a:lnTo>
+                  <a:lnTo>
+                    <a:pt x="0" y="685040"/>
                   </a:lnTo>
                 </a:path>
               </a:pathLst>
@@ -4364,312 +4364,312 @@
           </p:nvSpPr>
           <p:spPr>
             <a:xfrm>
-              <a:off x="1172049" y="2237495"/>
-              <a:ext cx="7090630" cy="3195554"/>
+              <a:off x="1172049" y="2225798"/>
+              <a:ext cx="7090630" cy="3207129"/>
             </a:xfrm>
             <a:custGeom>
               <a:avLst/>
               <a:pathLst>
-                <a:path w="7090630" h="3195554">
+                <a:path w="7090630" h="3207129">
                   <a:moveTo>
                     <a:pt x="0" y="0"/>
                   </a:moveTo>
                   <a:lnTo>
-                    <a:pt x="71622" y="108372"/>
-                  </a:lnTo>
-                  <a:lnTo>
-                    <a:pt x="143245" y="213206"/>
-                  </a:lnTo>
-                  <a:lnTo>
-                    <a:pt x="214867" y="314618"/>
-                  </a:lnTo>
-                  <a:lnTo>
-                    <a:pt x="286490" y="412720"/>
-                  </a:lnTo>
-                  <a:lnTo>
-                    <a:pt x="358112" y="507619"/>
-                  </a:lnTo>
-                  <a:lnTo>
-                    <a:pt x="429735" y="599420"/>
-                  </a:lnTo>
-                  <a:lnTo>
-                    <a:pt x="501357" y="688225"/>
-                  </a:lnTo>
-                  <a:lnTo>
-                    <a:pt x="572980" y="774130"/>
-                  </a:lnTo>
-                  <a:lnTo>
-                    <a:pt x="644602" y="857231"/>
-                  </a:lnTo>
-                  <a:lnTo>
-                    <a:pt x="716225" y="937620"/>
-                  </a:lnTo>
-                  <a:lnTo>
-                    <a:pt x="787847" y="1015384"/>
-                  </a:lnTo>
-                  <a:lnTo>
-                    <a:pt x="859470" y="1090609"/>
-                  </a:lnTo>
-                  <a:lnTo>
-                    <a:pt x="931092" y="1163379"/>
-                  </a:lnTo>
-                  <a:lnTo>
-                    <a:pt x="1002715" y="1233773"/>
-                  </a:lnTo>
-                  <a:lnTo>
-                    <a:pt x="1074337" y="1301869"/>
-                  </a:lnTo>
-                  <a:lnTo>
-                    <a:pt x="1145960" y="1367742"/>
-                  </a:lnTo>
-                  <a:lnTo>
-                    <a:pt x="1217582" y="1431465"/>
-                  </a:lnTo>
-                  <a:lnTo>
-                    <a:pt x="1289205" y="1493107"/>
-                  </a:lnTo>
-                  <a:lnTo>
-                    <a:pt x="1360827" y="1552738"/>
-                  </a:lnTo>
-                  <a:lnTo>
-                    <a:pt x="1432450" y="1610421"/>
-                  </a:lnTo>
-                  <a:lnTo>
-                    <a:pt x="1504073" y="1666222"/>
-                  </a:lnTo>
-                  <a:lnTo>
-                    <a:pt x="1575695" y="1720201"/>
-                  </a:lnTo>
-                  <a:lnTo>
-                    <a:pt x="1647318" y="1772418"/>
-                  </a:lnTo>
-                  <a:lnTo>
-                    <a:pt x="1718940" y="1822930"/>
-                  </a:lnTo>
-                  <a:lnTo>
-                    <a:pt x="1790563" y="1871793"/>
-                  </a:lnTo>
-                  <a:lnTo>
-                    <a:pt x="1862185" y="1919062"/>
-                  </a:lnTo>
-                  <a:lnTo>
-                    <a:pt x="1933808" y="1964787"/>
-                  </a:lnTo>
-                  <a:lnTo>
-                    <a:pt x="2005430" y="2009019"/>
-                  </a:lnTo>
-                  <a:lnTo>
-                    <a:pt x="2077053" y="2051808"/>
-                  </a:lnTo>
-                  <a:lnTo>
-                    <a:pt x="2148675" y="2093199"/>
-                  </a:lnTo>
-                  <a:lnTo>
-                    <a:pt x="2220298" y="2133240"/>
-                  </a:lnTo>
-                  <a:lnTo>
-                    <a:pt x="2291920" y="2171973"/>
-                  </a:lnTo>
-                  <a:lnTo>
-                    <a:pt x="2363543" y="2209442"/>
-                  </a:lnTo>
-                  <a:lnTo>
-                    <a:pt x="2435165" y="2245688"/>
-                  </a:lnTo>
-                  <a:lnTo>
-                    <a:pt x="2506788" y="2280751"/>
-                  </a:lnTo>
-                  <a:lnTo>
-                    <a:pt x="2578410" y="2314668"/>
-                  </a:lnTo>
-                  <a:lnTo>
-                    <a:pt x="2650033" y="2347479"/>
-                  </a:lnTo>
-                  <a:lnTo>
-                    <a:pt x="2721655" y="2379219"/>
-                  </a:lnTo>
-                  <a:lnTo>
-                    <a:pt x="2793278" y="2409922"/>
-                  </a:lnTo>
-                  <a:lnTo>
-                    <a:pt x="2864901" y="2439623"/>
-                  </a:lnTo>
-                  <a:lnTo>
-                    <a:pt x="2936523" y="2468355"/>
-                  </a:lnTo>
-                  <a:lnTo>
-                    <a:pt x="3008146" y="2496149"/>
-                  </a:lnTo>
-                  <a:lnTo>
-                    <a:pt x="3079768" y="2523035"/>
-                  </a:lnTo>
-                  <a:lnTo>
-                    <a:pt x="3151391" y="2549044"/>
-                  </a:lnTo>
-                  <a:lnTo>
-                    <a:pt x="3223013" y="2574203"/>
-                  </a:lnTo>
-                  <a:lnTo>
-                    <a:pt x="3294636" y="2598541"/>
-                  </a:lnTo>
-                  <a:lnTo>
-                    <a:pt x="3366258" y="2622085"/>
-                  </a:lnTo>
-                  <a:lnTo>
-                    <a:pt x="3437881" y="2644860"/>
-                  </a:lnTo>
-                  <a:lnTo>
-                    <a:pt x="3509503" y="2666892"/>
-                  </a:lnTo>
-                  <a:lnTo>
-                    <a:pt x="3581126" y="2688204"/>
-                  </a:lnTo>
-                  <a:lnTo>
-                    <a:pt x="3652748" y="2708821"/>
-                  </a:lnTo>
-                  <a:lnTo>
-                    <a:pt x="3724371" y="2728765"/>
-                  </a:lnTo>
-                  <a:lnTo>
-                    <a:pt x="3795993" y="2748058"/>
-                  </a:lnTo>
-                  <a:lnTo>
-                    <a:pt x="3867616" y="2766720"/>
-                  </a:lnTo>
-                  <a:lnTo>
-                    <a:pt x="3939238" y="2784774"/>
-                  </a:lnTo>
-                  <a:lnTo>
-                    <a:pt x="4010861" y="2802238"/>
-                  </a:lnTo>
-                  <a:lnTo>
-                    <a:pt x="4082483" y="2819132"/>
-                  </a:lnTo>
-                  <a:lnTo>
-                    <a:pt x="4154106" y="2835475"/>
-                  </a:lnTo>
-                  <a:lnTo>
-                    <a:pt x="4225729" y="2851284"/>
-                  </a:lnTo>
-                  <a:lnTo>
-                    <a:pt x="4297351" y="2866577"/>
-                  </a:lnTo>
-                  <a:lnTo>
-                    <a:pt x="4368974" y="2881371"/>
-                  </a:lnTo>
-                  <a:lnTo>
-                    <a:pt x="4440596" y="2895682"/>
-                  </a:lnTo>
-                  <a:lnTo>
-                    <a:pt x="4512219" y="2909526"/>
-                  </a:lnTo>
-                  <a:lnTo>
-                    <a:pt x="4583841" y="2922917"/>
-                  </a:lnTo>
-                  <a:lnTo>
-                    <a:pt x="4655464" y="2935872"/>
-                  </a:lnTo>
-                  <a:lnTo>
-                    <a:pt x="4727086" y="2948404"/>
-                  </a:lnTo>
-                  <a:lnTo>
-                    <a:pt x="4798709" y="2960526"/>
-                  </a:lnTo>
-                  <a:lnTo>
-                    <a:pt x="4870331" y="2972253"/>
-                  </a:lnTo>
-                  <a:lnTo>
-                    <a:pt x="4941954" y="2983597"/>
-                  </a:lnTo>
-                  <a:lnTo>
-                    <a:pt x="5013576" y="2994571"/>
-                  </a:lnTo>
-                  <a:lnTo>
-                    <a:pt x="5085199" y="3005186"/>
-                  </a:lnTo>
-                  <a:lnTo>
-                    <a:pt x="5156821" y="3015455"/>
-                  </a:lnTo>
-                  <a:lnTo>
-                    <a:pt x="5228444" y="3025389"/>
-                  </a:lnTo>
-                  <a:lnTo>
-                    <a:pt x="5300066" y="3034999"/>
-                  </a:lnTo>
-                  <a:lnTo>
-                    <a:pt x="5371689" y="3044294"/>
-                  </a:lnTo>
-                  <a:lnTo>
-                    <a:pt x="5443311" y="3053287"/>
-                  </a:lnTo>
-                  <a:lnTo>
-                    <a:pt x="5514934" y="3061985"/>
-                  </a:lnTo>
-                  <a:lnTo>
-                    <a:pt x="5586557" y="3070400"/>
-                  </a:lnTo>
-                  <a:lnTo>
-                    <a:pt x="5658179" y="3078540"/>
-                  </a:lnTo>
-                  <a:lnTo>
-                    <a:pt x="5729802" y="3086415"/>
-                  </a:lnTo>
-                  <a:lnTo>
-                    <a:pt x="5801424" y="3094032"/>
-                  </a:lnTo>
-                  <a:lnTo>
-                    <a:pt x="5873047" y="3101401"/>
-                  </a:lnTo>
-                  <a:lnTo>
-                    <a:pt x="5944669" y="3108529"/>
-                  </a:lnTo>
-                  <a:lnTo>
-                    <a:pt x="6016292" y="3115424"/>
-                  </a:lnTo>
-                  <a:lnTo>
-                    <a:pt x="6087914" y="3122094"/>
-                  </a:lnTo>
-                  <a:lnTo>
-                    <a:pt x="6159537" y="3128547"/>
-                  </a:lnTo>
-                  <a:lnTo>
-                    <a:pt x="6231159" y="3134789"/>
-                  </a:lnTo>
-                  <a:lnTo>
-                    <a:pt x="6302782" y="3140827"/>
-                  </a:lnTo>
-                  <a:lnTo>
-                    <a:pt x="6374404" y="3146668"/>
-                  </a:lnTo>
-                  <a:lnTo>
-                    <a:pt x="6446027" y="3152318"/>
-                  </a:lnTo>
-                  <a:lnTo>
-                    <a:pt x="6517649" y="3157784"/>
-                  </a:lnTo>
-                  <a:lnTo>
-                    <a:pt x="6589272" y="3163072"/>
-                  </a:lnTo>
-                  <a:lnTo>
-                    <a:pt x="6660894" y="3168186"/>
-                  </a:lnTo>
-                  <a:lnTo>
-                    <a:pt x="6732517" y="3173134"/>
-                  </a:lnTo>
-                  <a:lnTo>
-                    <a:pt x="6804139" y="3177921"/>
-                  </a:lnTo>
-                  <a:lnTo>
-                    <a:pt x="6875762" y="3182551"/>
-                  </a:lnTo>
-                  <a:lnTo>
-                    <a:pt x="6947385" y="3187030"/>
-                  </a:lnTo>
-                  <a:lnTo>
-                    <a:pt x="7019007" y="3191363"/>
-                  </a:lnTo>
-                  <a:lnTo>
-                    <a:pt x="7090630" y="3195554"/>
+                    <a:pt x="71622" y="108836"/>
+                  </a:lnTo>
+                  <a:lnTo>
+                    <a:pt x="143245" y="214118"/>
+                  </a:lnTo>
+                  <a:lnTo>
+                    <a:pt x="214867" y="315959"/>
+                  </a:lnTo>
+                  <a:lnTo>
+                    <a:pt x="286490" y="414474"/>
+                  </a:lnTo>
+                  <a:lnTo>
+                    <a:pt x="358112" y="509770"/>
+                  </a:lnTo>
+                  <a:lnTo>
+                    <a:pt x="429735" y="601953"/>
+                  </a:lnTo>
+                  <a:lnTo>
+                    <a:pt x="501357" y="691124"/>
+                  </a:lnTo>
+                  <a:lnTo>
+                    <a:pt x="572980" y="777383"/>
+                  </a:lnTo>
+                  <a:lnTo>
+                    <a:pt x="644602" y="860823"/>
+                  </a:lnTo>
+                  <a:lnTo>
+                    <a:pt x="716225" y="941537"/>
+                  </a:lnTo>
+                  <a:lnTo>
+                    <a:pt x="787847" y="1019614"/>
+                  </a:lnTo>
+                  <a:lnTo>
+                    <a:pt x="859470" y="1095141"/>
+                  </a:lnTo>
+                  <a:lnTo>
+                    <a:pt x="931092" y="1168200"/>
+                  </a:lnTo>
+                  <a:lnTo>
+                    <a:pt x="1002715" y="1238872"/>
+                  </a:lnTo>
+                  <a:lnTo>
+                    <a:pt x="1074337" y="1307236"/>
+                  </a:lnTo>
+                  <a:lnTo>
+                    <a:pt x="1145960" y="1373366"/>
+                  </a:lnTo>
+                  <a:lnTo>
+                    <a:pt x="1217582" y="1437335"/>
+                  </a:lnTo>
+                  <a:lnTo>
+                    <a:pt x="1289205" y="1499215"/>
+                  </a:lnTo>
+                  <a:lnTo>
+                    <a:pt x="1360827" y="1559074"/>
+                  </a:lnTo>
+                  <a:lnTo>
+                    <a:pt x="1432450" y="1616976"/>
+                  </a:lnTo>
+                  <a:lnTo>
+                    <a:pt x="1504073" y="1672987"/>
+                  </a:lnTo>
+                  <a:lnTo>
+                    <a:pt x="1575695" y="1727168"/>
+                  </a:lnTo>
+                  <a:lnTo>
+                    <a:pt x="1647318" y="1779580"/>
+                  </a:lnTo>
+                  <a:lnTo>
+                    <a:pt x="1718940" y="1830278"/>
+                  </a:lnTo>
+                  <a:lnTo>
+                    <a:pt x="1790563" y="1879321"/>
+                  </a:lnTo>
+                  <a:lnTo>
+                    <a:pt x="1862185" y="1926761"/>
+                  </a:lnTo>
+                  <a:lnTo>
+                    <a:pt x="1933808" y="1972652"/>
+                  </a:lnTo>
+                  <a:lnTo>
+                    <a:pt x="2005430" y="2017043"/>
+                  </a:lnTo>
+                  <a:lnTo>
+                    <a:pt x="2077053" y="2059984"/>
+                  </a:lnTo>
+                  <a:lnTo>
+                    <a:pt x="2148675" y="2101522"/>
+                  </a:lnTo>
+                  <a:lnTo>
+                    <a:pt x="2220298" y="2141703"/>
+                  </a:lnTo>
+                  <a:lnTo>
+                    <a:pt x="2291920" y="2180572"/>
+                  </a:lnTo>
+                  <a:lnTo>
+                    <a:pt x="2363543" y="2218171"/>
+                  </a:lnTo>
+                  <a:lnTo>
+                    <a:pt x="2435165" y="2254541"/>
+                  </a:lnTo>
+                  <a:lnTo>
+                    <a:pt x="2506788" y="2289723"/>
+                  </a:lnTo>
+                  <a:lnTo>
+                    <a:pt x="2578410" y="2323756"/>
+                  </a:lnTo>
+                  <a:lnTo>
+                    <a:pt x="2650033" y="2356677"/>
+                  </a:lnTo>
+                  <a:lnTo>
+                    <a:pt x="2721655" y="2388522"/>
+                  </a:lnTo>
+                  <a:lnTo>
+                    <a:pt x="2793278" y="2419327"/>
+                  </a:lnTo>
+                  <a:lnTo>
+                    <a:pt x="2864901" y="2449126"/>
+                  </a:lnTo>
+                  <a:lnTo>
+                    <a:pt x="2936523" y="2477951"/>
+                  </a:lnTo>
+                  <a:lnTo>
+                    <a:pt x="3008146" y="2505834"/>
+                  </a:lnTo>
+                  <a:lnTo>
+                    <a:pt x="3079768" y="2532807"/>
+                  </a:lnTo>
+                  <a:lnTo>
+                    <a:pt x="3151391" y="2558898"/>
+                  </a:lnTo>
+                  <a:lnTo>
+                    <a:pt x="3223013" y="2584137"/>
+                  </a:lnTo>
+                  <a:lnTo>
+                    <a:pt x="3294636" y="2608551"/>
+                  </a:lnTo>
+                  <a:lnTo>
+                    <a:pt x="3366258" y="2632168"/>
+                  </a:lnTo>
+                  <a:lnTo>
+                    <a:pt x="3437881" y="2655013"/>
+                  </a:lnTo>
+                  <a:lnTo>
+                    <a:pt x="3509503" y="2677112"/>
+                  </a:lnTo>
+                  <a:lnTo>
+                    <a:pt x="3581126" y="2698489"/>
+                  </a:lnTo>
+                  <a:lnTo>
+                    <a:pt x="3652748" y="2719168"/>
+                  </a:lnTo>
+                  <a:lnTo>
+                    <a:pt x="3724371" y="2739171"/>
+                  </a:lnTo>
+                  <a:lnTo>
+                    <a:pt x="3795993" y="2758520"/>
+                  </a:lnTo>
+                  <a:lnTo>
+                    <a:pt x="3867616" y="2777237"/>
+                  </a:lnTo>
+                  <a:lnTo>
+                    <a:pt x="3939238" y="2795343"/>
+                  </a:lnTo>
+                  <a:lnTo>
+                    <a:pt x="4010861" y="2812858"/>
+                  </a:lnTo>
+                  <a:lnTo>
+                    <a:pt x="4082483" y="2829800"/>
+                  </a:lnTo>
+                  <a:lnTo>
+                    <a:pt x="4154106" y="2846189"/>
+                  </a:lnTo>
+                  <a:lnTo>
+                    <a:pt x="4225729" y="2862042"/>
+                  </a:lnTo>
+                  <a:lnTo>
+                    <a:pt x="4297351" y="2877377"/>
+                  </a:lnTo>
+                  <a:lnTo>
+                    <a:pt x="4368974" y="2892212"/>
+                  </a:lnTo>
+                  <a:lnTo>
+                    <a:pt x="4440596" y="2906561"/>
+                  </a:lnTo>
+                  <a:lnTo>
+                    <a:pt x="4512219" y="2920442"/>
+                  </a:lnTo>
+                  <a:lnTo>
+                    <a:pt x="4583841" y="2933870"/>
+                  </a:lnTo>
+                  <a:lnTo>
+                    <a:pt x="4655464" y="2946858"/>
+                  </a:lnTo>
+                  <a:lnTo>
+                    <a:pt x="4727086" y="2959423"/>
+                  </a:lnTo>
+                  <a:lnTo>
+                    <a:pt x="4798709" y="2971577"/>
+                  </a:lnTo>
+                  <a:lnTo>
+                    <a:pt x="4870331" y="2983334"/>
+                  </a:lnTo>
+                  <a:lnTo>
+                    <a:pt x="4941954" y="2994707"/>
+                  </a:lnTo>
+                  <a:lnTo>
+                    <a:pt x="5013576" y="3005708"/>
+                  </a:lnTo>
+                  <a:lnTo>
+                    <a:pt x="5085199" y="3016350"/>
+                  </a:lnTo>
+                  <a:lnTo>
+                    <a:pt x="5156821" y="3026644"/>
+                  </a:lnTo>
+                  <a:lnTo>
+                    <a:pt x="5228444" y="3036602"/>
+                  </a:lnTo>
+                  <a:lnTo>
+                    <a:pt x="5300066" y="3046234"/>
+                  </a:lnTo>
+                  <a:lnTo>
+                    <a:pt x="5371689" y="3055552"/>
+                  </a:lnTo>
+                  <a:lnTo>
+                    <a:pt x="5443311" y="3064566"/>
+                  </a:lnTo>
+                  <a:lnTo>
+                    <a:pt x="5514934" y="3073285"/>
+                  </a:lnTo>
+                  <a:lnTo>
+                    <a:pt x="5586557" y="3081719"/>
+                  </a:lnTo>
+                  <a:lnTo>
+                    <a:pt x="5658179" y="3089878"/>
+                  </a:lnTo>
+                  <a:lnTo>
+                    <a:pt x="5729802" y="3097770"/>
+                  </a:lnTo>
+                  <a:lnTo>
+                    <a:pt x="5801424" y="3105404"/>
+                  </a:lnTo>
+                  <a:lnTo>
+                    <a:pt x="5873047" y="3112789"/>
+                  </a:lnTo>
+                  <a:lnTo>
+                    <a:pt x="5944669" y="3119932"/>
+                  </a:lnTo>
+                  <a:lnTo>
+                    <a:pt x="6016292" y="3126842"/>
+                  </a:lnTo>
+                  <a:lnTo>
+                    <a:pt x="6087914" y="3133527"/>
+                  </a:lnTo>
+                  <a:lnTo>
+                    <a:pt x="6159537" y="3139993"/>
+                  </a:lnTo>
+                  <a:lnTo>
+                    <a:pt x="6231159" y="3146248"/>
+                  </a:lnTo>
+                  <a:lnTo>
+                    <a:pt x="6302782" y="3152298"/>
+                  </a:lnTo>
+                  <a:lnTo>
+                    <a:pt x="6374404" y="3158151"/>
+                  </a:lnTo>
+                  <a:lnTo>
+                    <a:pt x="6446027" y="3163813"/>
+                  </a:lnTo>
+                  <a:lnTo>
+                    <a:pt x="6517649" y="3169289"/>
+                  </a:lnTo>
+                  <a:lnTo>
+                    <a:pt x="6589272" y="3174587"/>
+                  </a:lnTo>
+                  <a:lnTo>
+                    <a:pt x="6660894" y="3179712"/>
+                  </a:lnTo>
+                  <a:lnTo>
+                    <a:pt x="6732517" y="3184669"/>
+                  </a:lnTo>
+                  <a:lnTo>
+                    <a:pt x="6804139" y="3189464"/>
+                  </a:lnTo>
+                  <a:lnTo>
+                    <a:pt x="6875762" y="3194103"/>
+                  </a:lnTo>
+                  <a:lnTo>
+                    <a:pt x="6947385" y="3198590"/>
+                  </a:lnTo>
+                  <a:lnTo>
+                    <a:pt x="7019007" y="3202931"/>
+                  </a:lnTo>
+                  <a:lnTo>
+                    <a:pt x="7090630" y="3207129"/>
                   </a:lnTo>
                 </a:path>
               </a:pathLst>
@@ -4741,7 +4741,7 @@
           </p:nvSpPr>
           <p:spPr>
             <a:xfrm>
-              <a:off x="4164901" y="2073503"/>
+              <a:off x="4170171" y="2073503"/>
               <a:ext cx="0" cy="3649639"/>
             </a:xfrm>
             <a:custGeom>
@@ -5014,7 +5014,7 @@
           </p:nvSpPr>
           <p:spPr>
             <a:xfrm>
-              <a:off x="1382692" y="5785772"/>
+              <a:off x="1383511" y="5785772"/>
               <a:ext cx="161574" cy="80101"/>
             </a:xfrm>
             <a:prstGeom prst="rect">
@@ -5060,7 +5060,7 @@
           </p:nvSpPr>
           <p:spPr>
             <a:xfrm>
-              <a:off x="2284877" y="5785772"/>
+              <a:off x="2285456" y="5785772"/>
               <a:ext cx="161574" cy="80101"/>
             </a:xfrm>
             <a:prstGeom prst="rect">
@@ -5106,7 +5106,7 @@
           </p:nvSpPr>
           <p:spPr>
             <a:xfrm>
-              <a:off x="3187061" y="5785772"/>
+              <a:off x="3187401" y="5785772"/>
               <a:ext cx="161574" cy="80101"/>
             </a:xfrm>
             <a:prstGeom prst="rect">
@@ -5152,7 +5152,7 @@
           </p:nvSpPr>
           <p:spPr>
             <a:xfrm>
-              <a:off x="4138944" y="5785772"/>
+              <a:off x="4139043" y="5785772"/>
               <a:ext cx="62179" cy="80101"/>
             </a:xfrm>
             <a:prstGeom prst="rect">
@@ -5198,7 +5198,7 @@
           </p:nvSpPr>
           <p:spPr>
             <a:xfrm>
-              <a:off x="5010039" y="5785772"/>
+              <a:off x="5009898" y="5785772"/>
               <a:ext cx="124358" cy="80101"/>
             </a:xfrm>
             <a:prstGeom prst="rect">
@@ -5244,7 +5244,7 @@
           </p:nvSpPr>
           <p:spPr>
             <a:xfrm>
-              <a:off x="5912223" y="5785772"/>
+              <a:off x="5911843" y="5785772"/>
               <a:ext cx="124358" cy="80101"/>
             </a:xfrm>
             <a:prstGeom prst="rect">
@@ -5290,7 +5290,7 @@
           </p:nvSpPr>
           <p:spPr>
             <a:xfrm>
-              <a:off x="6814408" y="5785772"/>
+              <a:off x="6813788" y="5785772"/>
               <a:ext cx="124358" cy="80101"/>
             </a:xfrm>
             <a:prstGeom prst="rect">
@@ -5336,7 +5336,7 @@
           </p:nvSpPr>
           <p:spPr>
             <a:xfrm>
-              <a:off x="7716592" y="5785772"/>
+              <a:off x="7715733" y="5785772"/>
               <a:ext cx="124358" cy="80101"/>
             </a:xfrm>
             <a:prstGeom prst="rect">
@@ -5507,7 +5507,7 @@
                   <a:latin typeface="Helvetica"/>
                   <a:cs typeface="Helvetica"/>
                 </a:rPr>
-                <a:t>subHR per 10 % decline: 1.52 (0.57-4.03), p = 0.401  |  per IQR decline (Δ = 27.4 %): 3.15 (0.22-45.75)  |  IQR: [-12.6, 14.8] %</a:t>
+                <a:t>subHR per 10 % decline: 1.52 (0.57-4.02), p = 0.399  |  per IQR decline (Δ = 27.2 %): 3.12 (0.22-43.97)  |  IQR: [-12.3, 14.9] %</a:t>
               </a:r>
             </a:p>
           </p:txBody>
